--- a/rid_2026_seminarski/mi21126_Aleksandar_Stojcic/Monero kao kriptovaluta.pptx
+++ b/rid_2026_seminarski/mi21126_Aleksandar_Stojcic/Monero kao kriptovaluta.pptx
@@ -11,13 +11,14 @@
     <p:sldId id="258" r:id="rId5"/>
     <p:sldId id="259" r:id="rId6"/>
     <p:sldId id="260" r:id="rId7"/>
-    <p:sldId id="261" r:id="rId8"/>
-    <p:sldId id="263" r:id="rId9"/>
-    <p:sldId id="264" r:id="rId10"/>
-    <p:sldId id="265" r:id="rId11"/>
-    <p:sldId id="266" r:id="rId12"/>
-    <p:sldId id="267" r:id="rId13"/>
-    <p:sldId id="268" r:id="rId14"/>
+    <p:sldId id="269" r:id="rId8"/>
+    <p:sldId id="261" r:id="rId9"/>
+    <p:sldId id="263" r:id="rId10"/>
+    <p:sldId id="264" r:id="rId11"/>
+    <p:sldId id="265" r:id="rId12"/>
+    <p:sldId id="266" r:id="rId13"/>
+    <p:sldId id="267" r:id="rId14"/>
+    <p:sldId id="268" r:id="rId15"/>
   </p:sldIdLst>
   <p:sldSz cx="12192000" cy="6858000"/>
   <p:notesSz cx="6858000" cy="9144000"/>
@@ -116,6 +117,11 @@
       </a:defRPr>
     </a:lvl9pPr>
   </p:defaultTextStyle>
+  <p:extLst>
+    <p:ext uri="{EFAFB233-063F-42B5-8137-9DF3F51BA10A}">
+      <p15:sldGuideLst xmlns:p15="http://schemas.microsoft.com/office/powerpoint/2012/main"/>
+    </p:ext>
+  </p:extLst>
 </p:presentation>
 </file>
 
@@ -266,7 +272,7 @@
           <a:p>
             <a:fld id="{F7CB6EBB-FFC2-4C8C-83B1-020662C2AE18}" type="datetimeFigureOut">
               <a:rPr lang="en-US" smtClean="0"/>
-              <a:t>15-Jun-26</a:t>
+              <a:t>27-Sep-26</a:t>
             </a:fld>
             <a:endParaRPr lang="en-US" dirty="0"/>
           </a:p>
@@ -464,7 +470,7 @@
           <a:p>
             <a:fld id="{F7CB6EBB-FFC2-4C8C-83B1-020662C2AE18}" type="datetimeFigureOut">
               <a:rPr lang="en-US" smtClean="0"/>
-              <a:t>15-Jun-26</a:t>
+              <a:t>27-Sep-26</a:t>
             </a:fld>
             <a:endParaRPr lang="en-US" dirty="0"/>
           </a:p>
@@ -672,7 +678,7 @@
           <a:p>
             <a:fld id="{F7CB6EBB-FFC2-4C8C-83B1-020662C2AE18}" type="datetimeFigureOut">
               <a:rPr lang="en-US" smtClean="0"/>
-              <a:t>15-Jun-26</a:t>
+              <a:t>27-Sep-26</a:t>
             </a:fld>
             <a:endParaRPr lang="en-US" dirty="0"/>
           </a:p>
@@ -870,7 +876,7 @@
           <a:p>
             <a:fld id="{F7CB6EBB-FFC2-4C8C-83B1-020662C2AE18}" type="datetimeFigureOut">
               <a:rPr lang="en-US" smtClean="0"/>
-              <a:t>15-Jun-26</a:t>
+              <a:t>27-Sep-26</a:t>
             </a:fld>
             <a:endParaRPr lang="en-US" dirty="0"/>
           </a:p>
@@ -1145,7 +1151,7 @@
           <a:p>
             <a:fld id="{F7CB6EBB-FFC2-4C8C-83B1-020662C2AE18}" type="datetimeFigureOut">
               <a:rPr lang="en-US" smtClean="0"/>
-              <a:t>15-Jun-26</a:t>
+              <a:t>27-Sep-26</a:t>
             </a:fld>
             <a:endParaRPr lang="en-US" dirty="0"/>
           </a:p>
@@ -1410,7 +1416,7 @@
           <a:p>
             <a:fld id="{F7CB6EBB-FFC2-4C8C-83B1-020662C2AE18}" type="datetimeFigureOut">
               <a:rPr lang="en-US" smtClean="0"/>
-              <a:t>15-Jun-26</a:t>
+              <a:t>27-Sep-26</a:t>
             </a:fld>
             <a:endParaRPr lang="en-US" dirty="0"/>
           </a:p>
@@ -1822,7 +1828,7 @@
           <a:p>
             <a:fld id="{F7CB6EBB-FFC2-4C8C-83B1-020662C2AE18}" type="datetimeFigureOut">
               <a:rPr lang="en-US" smtClean="0"/>
-              <a:t>15-Jun-26</a:t>
+              <a:t>27-Sep-26</a:t>
             </a:fld>
             <a:endParaRPr lang="en-US" dirty="0"/>
           </a:p>
@@ -1963,7 +1969,7 @@
           <a:p>
             <a:fld id="{F7CB6EBB-FFC2-4C8C-83B1-020662C2AE18}" type="datetimeFigureOut">
               <a:rPr lang="en-US" smtClean="0"/>
-              <a:t>15-Jun-26</a:t>
+              <a:t>27-Sep-26</a:t>
             </a:fld>
             <a:endParaRPr lang="en-US" dirty="0"/>
           </a:p>
@@ -2076,7 +2082,7 @@
           <a:p>
             <a:fld id="{F7CB6EBB-FFC2-4C8C-83B1-020662C2AE18}" type="datetimeFigureOut">
               <a:rPr lang="en-US" smtClean="0"/>
-              <a:t>15-Jun-26</a:t>
+              <a:t>27-Sep-26</a:t>
             </a:fld>
             <a:endParaRPr lang="en-US" dirty="0"/>
           </a:p>
@@ -2387,7 +2393,7 @@
           <a:p>
             <a:fld id="{F7CB6EBB-FFC2-4C8C-83B1-020662C2AE18}" type="datetimeFigureOut">
               <a:rPr lang="en-US" smtClean="0"/>
-              <a:t>15-Jun-26</a:t>
+              <a:t>27-Sep-26</a:t>
             </a:fld>
             <a:endParaRPr lang="en-US" dirty="0"/>
           </a:p>
@@ -2675,7 +2681,7 @@
           <a:p>
             <a:fld id="{F7CB6EBB-FFC2-4C8C-83B1-020662C2AE18}" type="datetimeFigureOut">
               <a:rPr lang="en-US" smtClean="0"/>
-              <a:t>15-Jun-26</a:t>
+              <a:t>27-Sep-26</a:t>
             </a:fld>
             <a:endParaRPr lang="en-US" dirty="0"/>
           </a:p>
@@ -2923,7 +2929,7 @@
           <a:p>
             <a:fld id="{F7CB6EBB-FFC2-4C8C-83B1-020662C2AE18}" type="datetimeFigureOut">
               <a:rPr lang="en-US" smtClean="0"/>
-              <a:t>15-Jun-26</a:t>
+              <a:t>27-Sep-26</a:t>
             </a:fld>
             <a:endParaRPr lang="en-US" dirty="0"/>
           </a:p>
@@ -3469,6 +3475,123 @@
           <p:cNvPr id="2" name="Title 1">
             <a:extLst>
               <a:ext uri="{FF2B5EF4-FFF2-40B4-BE49-F238E27FC236}">
+                <a16:creationId xmlns:a16="http://schemas.microsoft.com/office/drawing/2014/main" id="{60204AB8-B8C4-68E5-8618-190200BF1881}"/>
+              </a:ext>
+            </a:extLst>
+          </p:cNvPr>
+          <p:cNvSpPr>
+            <a:spLocks noGrp="1"/>
+          </p:cNvSpPr>
+          <p:nvPr>
+            <p:ph type="title"/>
+          </p:nvPr>
+        </p:nvSpPr>
+        <p:spPr>
+          <a:xfrm>
+            <a:off x="838199" y="73294"/>
+            <a:ext cx="10515600" cy="1325563"/>
+          </a:xfrm>
+        </p:spPr>
+        <p:txBody>
+          <a:bodyPr>
+            <a:normAutofit/>
+          </a:bodyPr>
+          <a:lstStyle/>
+          <a:p>
+            <a:pPr algn="ctr"/>
+            <a:r>
+              <a:rPr lang="sr-Latn-RS" sz="4000" dirty="0">
+                <a:latin typeface="Inter Medium" panose="02000503000000020004" pitchFamily="2" charset="0"/>
+                <a:ea typeface="Inter Medium" panose="02000503000000020004" pitchFamily="2" charset="0"/>
+              </a:rPr>
+              <a:t>Potpisi prstena</a:t>
+            </a:r>
+            <a:endParaRPr lang="en-US" sz="4000" dirty="0">
+              <a:latin typeface="Inter Medium" panose="02000503000000020004" pitchFamily="2" charset="0"/>
+              <a:ea typeface="Inter Medium" panose="02000503000000020004" pitchFamily="2" charset="0"/>
+            </a:endParaRPr>
+          </a:p>
+        </p:txBody>
+      </p:sp>
+      <p:pic>
+        <p:nvPicPr>
+          <p:cNvPr id="9" name="Content Placeholder 8">
+            <a:extLst>
+              <a:ext uri="{FF2B5EF4-FFF2-40B4-BE49-F238E27FC236}">
+                <a16:creationId xmlns:a16="http://schemas.microsoft.com/office/drawing/2014/main" id="{A7E69270-386F-4019-ACB5-0FFE243988B6}"/>
+              </a:ext>
+            </a:extLst>
+          </p:cNvPr>
+          <p:cNvPicPr>
+            <a:picLocks noGrp="1" noChangeAspect="1"/>
+          </p:cNvPicPr>
+          <p:nvPr>
+            <p:ph idx="1"/>
+          </p:nvPr>
+        </p:nvPicPr>
+        <p:blipFill>
+          <a:blip r:embed="rId2">
+            <a:extLst>
+              <a:ext uri="{28A0092B-C50C-407E-A947-70E740481C1C}">
+                <a14:useLocalDpi xmlns:a14="http://schemas.microsoft.com/office/drawing/2010/main" val="0"/>
+              </a:ext>
+            </a:extLst>
+          </a:blip>
+          <a:stretch>
+            <a:fillRect/>
+          </a:stretch>
+        </p:blipFill>
+        <p:spPr>
+          <a:xfrm>
+            <a:off x="1809346" y="1194577"/>
+            <a:ext cx="8384936" cy="5001942"/>
+          </a:xfrm>
+          <a:prstGeom prst="rect">
+            <a:avLst/>
+          </a:prstGeom>
+          <a:ln>
+            <a:noFill/>
+          </a:ln>
+          <a:effectLst>
+            <a:softEdge rad="112500"/>
+          </a:effectLst>
+        </p:spPr>
+      </p:pic>
+    </p:spTree>
+    <p:extLst>
+      <p:ext uri="{BB962C8B-B14F-4D97-AF65-F5344CB8AC3E}">
+        <p14:creationId xmlns:p14="http://schemas.microsoft.com/office/powerpoint/2010/main" val="4068785972"/>
+      </p:ext>
+    </p:extLst>
+  </p:cSld>
+  <p:clrMapOvr>
+    <a:masterClrMapping/>
+  </p:clrMapOvr>
+</p:sld>
+</file>
+
+<file path=ppt/slides/slide11.xml><?xml version="1.0" encoding="utf-8"?>
+<p:sld xmlns:a="http://schemas.openxmlformats.org/drawingml/2006/main" xmlns:r="http://schemas.openxmlformats.org/officeDocument/2006/relationships" xmlns:p="http://schemas.openxmlformats.org/presentationml/2006/main">
+  <p:cSld>
+    <p:spTree>
+      <p:nvGrpSpPr>
+        <p:cNvPr id="1" name=""/>
+        <p:cNvGrpSpPr/>
+        <p:nvPr/>
+      </p:nvGrpSpPr>
+      <p:grpSpPr>
+        <a:xfrm>
+          <a:off x="0" y="0"/>
+          <a:ext cx="0" cy="0"/>
+          <a:chOff x="0" y="0"/>
+          <a:chExt cx="0" cy="0"/>
+        </a:xfrm>
+      </p:grpSpPr>
+      <p:sp>
+        <p:nvSpPr>
+          <p:cNvPr id="2" name="Title 1">
+            <a:extLst>
+              <a:ext uri="{FF2B5EF4-FFF2-40B4-BE49-F238E27FC236}">
                 <a16:creationId xmlns:a16="http://schemas.microsoft.com/office/drawing/2014/main" id="{BF06EF63-020B-4635-CBB1-7E914BF66DF7}"/>
               </a:ext>
             </a:extLst>
@@ -3564,7 +3687,7 @@
 </p:sld>
 </file>
 
-<file path=ppt/slides/slide11.xml><?xml version="1.0" encoding="utf-8"?>
+<file path=ppt/slides/slide12.xml><?xml version="1.0" encoding="utf-8"?>
 <p:sld xmlns:a="http://schemas.openxmlformats.org/drawingml/2006/main" xmlns:r="http://schemas.openxmlformats.org/officeDocument/2006/relationships" xmlns:p="http://schemas.openxmlformats.org/presentationml/2006/main">
   <p:cSld>
     <p:spTree>
@@ -3699,7 +3822,7 @@
 </p:sld>
 </file>
 
-<file path=ppt/slides/slide12.xml><?xml version="1.0" encoding="utf-8"?>
+<file path=ppt/slides/slide13.xml><?xml version="1.0" encoding="utf-8"?>
 <p:sld xmlns:a="http://schemas.openxmlformats.org/drawingml/2006/main" xmlns:r="http://schemas.openxmlformats.org/officeDocument/2006/relationships" xmlns:p="http://schemas.openxmlformats.org/presentationml/2006/main">
   <p:cSld>
     <p:spTree>
@@ -3810,7 +3933,7 @@
 </p:sld>
 </file>
 
-<file path=ppt/slides/slide13.xml><?xml version="1.0" encoding="utf-8"?>
+<file path=ppt/slides/slide14.xml><?xml version="1.0" encoding="utf-8"?>
 <p:sld xmlns:a="http://schemas.openxmlformats.org/drawingml/2006/main" xmlns:r="http://schemas.openxmlformats.org/officeDocument/2006/relationships" xmlns:p="http://schemas.openxmlformats.org/presentationml/2006/main">
   <p:cSld>
     <p:spTree>
@@ -3845,8 +3968,8 @@
         </p:nvSpPr>
         <p:spPr>
           <a:xfrm>
-            <a:off x="1972283" y="998771"/>
-            <a:ext cx="8475224" cy="1238589"/>
+            <a:off x="859681" y="1045473"/>
+            <a:ext cx="10121585" cy="1833193"/>
           </a:xfrm>
         </p:spPr>
         <p:txBody>
@@ -3859,7 +3982,7 @@
               <a:buNone/>
             </a:pPr>
             <a:r>
-              <a:rPr lang="en-US" sz="4000" dirty="0">
+              <a:rPr lang="en-US" sz="4800" dirty="0">
                 <a:latin typeface="Inter Medium" panose="02000503000000020004" pitchFamily="2" charset="0"/>
                 <a:ea typeface="Inter Medium" panose="02000503000000020004" pitchFamily="2" charset="0"/>
               </a:rPr>
@@ -4468,6 +4591,231 @@
           <p:cNvPr id="2" name="Title 1">
             <a:extLst>
               <a:ext uri="{FF2B5EF4-FFF2-40B4-BE49-F238E27FC236}">
+                <a16:creationId xmlns:a16="http://schemas.microsoft.com/office/drawing/2014/main" id="{D7CBF633-E58A-9CCA-5FA1-05801BC2F2E1}"/>
+              </a:ext>
+            </a:extLst>
+          </p:cNvPr>
+          <p:cNvSpPr>
+            <a:spLocks noGrp="1"/>
+          </p:cNvSpPr>
+          <p:nvPr>
+            <p:ph type="title"/>
+          </p:nvPr>
+        </p:nvSpPr>
+        <p:spPr>
+          <a:xfrm>
+            <a:off x="838200" y="18255"/>
+            <a:ext cx="10515600" cy="1325563"/>
+          </a:xfrm>
+        </p:spPr>
+        <p:txBody>
+          <a:bodyPr>
+            <a:normAutofit/>
+          </a:bodyPr>
+          <a:lstStyle/>
+          <a:p>
+            <a:pPr algn="ctr"/>
+            <a:r>
+              <a:rPr lang="en-US" sz="4000" dirty="0" err="1">
+                <a:latin typeface="Inter Medium" panose="02000503000000020004" pitchFamily="2" charset="0"/>
+                <a:ea typeface="Inter Medium" panose="02000503000000020004" pitchFamily="2" charset="0"/>
+              </a:rPr>
+              <a:t>Bitkoin</a:t>
+            </a:r>
+            <a:endParaRPr lang="en-US" sz="4000" dirty="0">
+              <a:latin typeface="Inter Medium" panose="02000503000000020004" pitchFamily="2" charset="0"/>
+              <a:ea typeface="Inter Medium" panose="02000503000000020004" pitchFamily="2" charset="0"/>
+            </a:endParaRPr>
+          </a:p>
+        </p:txBody>
+      </p:sp>
+      <p:sp>
+        <p:nvSpPr>
+          <p:cNvPr id="3" name="Content Placeholder 2">
+            <a:extLst>
+              <a:ext uri="{FF2B5EF4-FFF2-40B4-BE49-F238E27FC236}">
+                <a16:creationId xmlns:a16="http://schemas.microsoft.com/office/drawing/2014/main" id="{48DDF6BE-61A2-7FA8-29FF-999C7DAE830B}"/>
+              </a:ext>
+            </a:extLst>
+          </p:cNvPr>
+          <p:cNvSpPr>
+            <a:spLocks noGrp="1"/>
+          </p:cNvSpPr>
+          <p:nvPr>
+            <p:ph idx="1"/>
+          </p:nvPr>
+        </p:nvSpPr>
+        <p:spPr>
+          <a:xfrm>
+            <a:off x="143932" y="1253331"/>
+            <a:ext cx="7323667" cy="4351338"/>
+          </a:xfrm>
+        </p:spPr>
+        <p:txBody>
+          <a:bodyPr>
+            <a:normAutofit/>
+          </a:bodyPr>
+          <a:lstStyle/>
+          <a:p>
+            <a:pPr marL="0" indent="0">
+              <a:buNone/>
+            </a:pPr>
+            <a:r>
+              <a:rPr lang="en-US" sz="3200" dirty="0">
+                <a:latin typeface="Inter Medium" panose="02000503000000020004" pitchFamily="2" charset="0"/>
+                <a:ea typeface="Inter Medium" panose="02000503000000020004" pitchFamily="2" charset="0"/>
+              </a:rPr>
+              <a:t>Prva </a:t>
+            </a:r>
+            <a:r>
+              <a:rPr lang="en-US" sz="3200" dirty="0" err="1">
+                <a:latin typeface="Inter Medium" panose="02000503000000020004" pitchFamily="2" charset="0"/>
+                <a:ea typeface="Inter Medium" panose="02000503000000020004" pitchFamily="2" charset="0"/>
+              </a:rPr>
+              <a:t>kriptovaluta</a:t>
+            </a:r>
+            <a:r>
+              <a:rPr lang="en-US" sz="3200" dirty="0">
+                <a:latin typeface="Inter Medium" panose="02000503000000020004" pitchFamily="2" charset="0"/>
+                <a:ea typeface="Inter Medium" panose="02000503000000020004" pitchFamily="2" charset="0"/>
+              </a:rPr>
+              <a:t> u </a:t>
+            </a:r>
+            <a:r>
+              <a:rPr lang="sr-Latn-RS" sz="3200" dirty="0">
+                <a:latin typeface="Inter Medium" panose="02000503000000020004" pitchFamily="2" charset="0"/>
+                <a:ea typeface="Inter Medium" panose="02000503000000020004" pitchFamily="2" charset="0"/>
+              </a:rPr>
+              <a:t>širokoj upotrebi</a:t>
+            </a:r>
+          </a:p>
+          <a:p>
+            <a:pPr marL="0" indent="0">
+              <a:buNone/>
+            </a:pPr>
+            <a:endParaRPr lang="sr-Latn-RS" sz="3200" dirty="0">
+              <a:latin typeface="Inter Medium" panose="02000503000000020004" pitchFamily="2" charset="0"/>
+              <a:ea typeface="Inter Medium" panose="02000503000000020004" pitchFamily="2" charset="0"/>
+            </a:endParaRPr>
+          </a:p>
+          <a:p>
+            <a:pPr marL="0" indent="0">
+              <a:buNone/>
+            </a:pPr>
+            <a:r>
+              <a:rPr lang="sr-Latn-RS" sz="3200" dirty="0">
+                <a:latin typeface="Inter Medium" panose="02000503000000020004" pitchFamily="2" charset="0"/>
+                <a:ea typeface="Inter Medium" panose="02000503000000020004" pitchFamily="2" charset="0"/>
+              </a:rPr>
+              <a:t>Promovisana kao </a:t>
+            </a:r>
+            <a:r>
+              <a:rPr lang="sr-Latn-RS" sz="3200" b="1" i="1" dirty="0">
+                <a:latin typeface="Inter Medium" panose="02000503000000020004" pitchFamily="2" charset="0"/>
+                <a:ea typeface="Inter Medium" panose="02000503000000020004" pitchFamily="2" charset="0"/>
+              </a:rPr>
+              <a:t>bezbedna</a:t>
+            </a:r>
+          </a:p>
+          <a:p>
+            <a:pPr marL="0" indent="0">
+              <a:buNone/>
+            </a:pPr>
+            <a:endParaRPr lang="sr-Latn-RS" sz="3200" dirty="0">
+              <a:latin typeface="Inter Medium" panose="02000503000000020004" pitchFamily="2" charset="0"/>
+              <a:ea typeface="Inter Medium" panose="02000503000000020004" pitchFamily="2" charset="0"/>
+            </a:endParaRPr>
+          </a:p>
+          <a:p>
+            <a:pPr marL="0" indent="0">
+              <a:buNone/>
+            </a:pPr>
+            <a:r>
+              <a:rPr lang="sr-Latn-RS" sz="3200" dirty="0">
+                <a:latin typeface="Inter Medium" panose="02000503000000020004" pitchFamily="2" charset="0"/>
+                <a:ea typeface="Inter Medium" panose="02000503000000020004" pitchFamily="2" charset="0"/>
+              </a:rPr>
+              <a:t>Zbog neanonimnosti Bitkoina, FBI 2013. godine zatvara najveće crno tržište na internetu „Silk Road“</a:t>
+            </a:r>
+            <a:endParaRPr lang="en-US" sz="3200" dirty="0">
+              <a:latin typeface="Inter Medium" panose="02000503000000020004" pitchFamily="2" charset="0"/>
+              <a:ea typeface="Inter Medium" panose="02000503000000020004" pitchFamily="2" charset="0"/>
+            </a:endParaRPr>
+          </a:p>
+        </p:txBody>
+      </p:sp>
+      <p:pic>
+        <p:nvPicPr>
+          <p:cNvPr id="4" name="Picture 3" descr="Bitcoin - Wikipedia">
+            <a:extLst>
+              <a:ext uri="{FF2B5EF4-FFF2-40B4-BE49-F238E27FC236}">
+                <a16:creationId xmlns:a16="http://schemas.microsoft.com/office/drawing/2014/main" id="{C5D6F804-ED65-B1C7-4307-061CA938BDFB}"/>
+              </a:ext>
+            </a:extLst>
+          </p:cNvPr>
+          <p:cNvPicPr>
+            <a:picLocks noChangeAspect="1"/>
+          </p:cNvPicPr>
+          <p:nvPr/>
+        </p:nvPicPr>
+        <p:blipFill>
+          <a:blip r:embed="rId2"/>
+          <a:stretch>
+            <a:fillRect/>
+          </a:stretch>
+        </p:blipFill>
+        <p:spPr>
+          <a:xfrm>
+            <a:off x="7239001" y="1019704"/>
+            <a:ext cx="4631266" cy="4631266"/>
+          </a:xfrm>
+          <a:prstGeom prst="rect">
+            <a:avLst/>
+          </a:prstGeom>
+          <a:effectLst>
+            <a:outerShdw blurRad="63500" sx="102000" sy="102000" algn="ctr" rotWithShape="0">
+              <a:prstClr val="black">
+                <a:alpha val="40000"/>
+              </a:prstClr>
+            </a:outerShdw>
+          </a:effectLst>
+        </p:spPr>
+      </p:pic>
+    </p:spTree>
+    <p:extLst>
+      <p:ext uri="{BB962C8B-B14F-4D97-AF65-F5344CB8AC3E}">
+        <p14:creationId xmlns:p14="http://schemas.microsoft.com/office/powerpoint/2010/main" val="317285090"/>
+      </p:ext>
+    </p:extLst>
+  </p:cSld>
+  <p:clrMapOvr>
+    <a:masterClrMapping/>
+  </p:clrMapOvr>
+</p:sld>
+</file>
+
+<file path=ppt/slides/slide8.xml><?xml version="1.0" encoding="utf-8"?>
+<p:sld xmlns:a="http://schemas.openxmlformats.org/drawingml/2006/main" xmlns:r="http://schemas.openxmlformats.org/officeDocument/2006/relationships" xmlns:p="http://schemas.openxmlformats.org/presentationml/2006/main">
+  <p:cSld>
+    <p:spTree>
+      <p:nvGrpSpPr>
+        <p:cNvPr id="1" name=""/>
+        <p:cNvGrpSpPr/>
+        <p:nvPr/>
+      </p:nvGrpSpPr>
+      <p:grpSpPr>
+        <a:xfrm>
+          <a:off x="0" y="0"/>
+          <a:ext cx="0" cy="0"/>
+          <a:chOff x="0" y="0"/>
+          <a:chExt cx="0" cy="0"/>
+        </a:xfrm>
+      </p:grpSpPr>
+      <p:sp>
+        <p:nvSpPr>
+          <p:cNvPr id="2" name="Title 1">
+            <a:extLst>
+              <a:ext uri="{FF2B5EF4-FFF2-40B4-BE49-F238E27FC236}">
                 <a16:creationId xmlns:a16="http://schemas.microsoft.com/office/drawing/2014/main" id="{879D288C-2C11-FD1B-6859-4F70D0C01949}"/>
               </a:ext>
             </a:extLst>
@@ -4522,7 +4870,7 @@
             <p:ph idx="1"/>
             <p:extLst>
               <p:ext uri="{D42A27DB-BD31-4B8C-83A1-F6EECF244321}">
-                <p14:modId xmlns:p14="http://schemas.microsoft.com/office/powerpoint/2010/main" val="2248713237"/>
+                <p14:modId xmlns:p14="http://schemas.microsoft.com/office/powerpoint/2010/main" val="3816200020"/>
               </p:ext>
             </p:extLst>
           </p:nvPr>
@@ -4730,12 +5078,15 @@
                           <a:latin typeface="Inter Medium" panose="02000503000000020004" pitchFamily="2" charset="0"/>
                           <a:ea typeface="Inter Medium" panose="02000503000000020004" pitchFamily="2" charset="0"/>
                         </a:rPr>
-                        <a:t>Javno vidljiva</a:t>
+                        <a:t>Javn</a:t>
                       </a:r>
-                      <a:endParaRPr lang="en-US" sz="3200" dirty="0">
-                        <a:latin typeface="Inter Medium" panose="02000503000000020004" pitchFamily="2" charset="0"/>
-                        <a:ea typeface="Inter Medium" panose="02000503000000020004" pitchFamily="2" charset="0"/>
-                      </a:endParaRPr>
+                      <a:r>
+                        <a:rPr lang="en-US" sz="3200" dirty="0">
+                          <a:latin typeface="Inter Medium" panose="02000503000000020004" pitchFamily="2" charset="0"/>
+                          <a:ea typeface="Inter Medium" panose="02000503000000020004" pitchFamily="2" charset="0"/>
+                        </a:rPr>
+                        <a:t>a</a:t>
+                      </a:r>
                     </a:p>
                   </a:txBody>
                   <a:tcPr/>
@@ -4797,12 +5148,15 @@
                           <a:latin typeface="Inter Medium" panose="02000503000000020004" pitchFamily="2" charset="0"/>
                           <a:ea typeface="Inter Medium" panose="02000503000000020004" pitchFamily="2" charset="0"/>
                         </a:rPr>
-                        <a:t>Javno vidljiva</a:t>
+                        <a:t>Javn</a:t>
                       </a:r>
-                      <a:endParaRPr lang="en-US" sz="3200" dirty="0">
-                        <a:latin typeface="Inter Medium" panose="02000503000000020004" pitchFamily="2" charset="0"/>
-                        <a:ea typeface="Inter Medium" panose="02000503000000020004" pitchFamily="2" charset="0"/>
-                      </a:endParaRPr>
+                      <a:r>
+                        <a:rPr lang="en-US" sz="3200" dirty="0">
+                          <a:latin typeface="Inter Medium" panose="02000503000000020004" pitchFamily="2" charset="0"/>
+                          <a:ea typeface="Inter Medium" panose="02000503000000020004" pitchFamily="2" charset="0"/>
+                        </a:rPr>
+                        <a:t>a</a:t>
+                      </a:r>
                     </a:p>
                   </a:txBody>
                   <a:tcPr/>
@@ -4864,12 +5218,15 @@
                           <a:latin typeface="Inter Medium" panose="02000503000000020004" pitchFamily="2" charset="0"/>
                           <a:ea typeface="Inter Medium" panose="02000503000000020004" pitchFamily="2" charset="0"/>
                         </a:rPr>
-                        <a:t>Javno vidljiv</a:t>
+                        <a:t>Jav</a:t>
                       </a:r>
-                      <a:endParaRPr lang="en-US" sz="3200" dirty="0">
-                        <a:latin typeface="Inter Medium" panose="02000503000000020004" pitchFamily="2" charset="0"/>
-                        <a:ea typeface="Inter Medium" panose="02000503000000020004" pitchFamily="2" charset="0"/>
-                      </a:endParaRPr>
+                      <a:r>
+                        <a:rPr lang="en-US" sz="3200" dirty="0">
+                          <a:latin typeface="Inter Medium" panose="02000503000000020004" pitchFamily="2" charset="0"/>
+                          <a:ea typeface="Inter Medium" panose="02000503000000020004" pitchFamily="2" charset="0"/>
+                        </a:rPr>
+                        <a:t>an</a:t>
+                      </a:r>
                     </a:p>
                   </a:txBody>
                   <a:tcPr/>
@@ -4984,7 +5341,7 @@
 </p:sld>
 </file>
 
-<file path=ppt/slides/slide8.xml><?xml version="1.0" encoding="utf-8"?>
+<file path=ppt/slides/slide9.xml><?xml version="1.0" encoding="utf-8"?>
 <p:sld xmlns:a="http://schemas.openxmlformats.org/drawingml/2006/main" xmlns:r="http://schemas.openxmlformats.org/officeDocument/2006/relationships" xmlns:p="http://schemas.openxmlformats.org/presentationml/2006/main">
   <p:cSld>
     <p:spTree>
@@ -5090,123 +5447,6 @@
     <p:extLst>
       <p:ext uri="{BB962C8B-B14F-4D97-AF65-F5344CB8AC3E}">
         <p14:creationId xmlns:p14="http://schemas.microsoft.com/office/powerpoint/2010/main" val="3747825184"/>
-      </p:ext>
-    </p:extLst>
-  </p:cSld>
-  <p:clrMapOvr>
-    <a:masterClrMapping/>
-  </p:clrMapOvr>
-</p:sld>
-</file>
-
-<file path=ppt/slides/slide9.xml><?xml version="1.0" encoding="utf-8"?>
-<p:sld xmlns:a="http://schemas.openxmlformats.org/drawingml/2006/main" xmlns:r="http://schemas.openxmlformats.org/officeDocument/2006/relationships" xmlns:p="http://schemas.openxmlformats.org/presentationml/2006/main">
-  <p:cSld>
-    <p:spTree>
-      <p:nvGrpSpPr>
-        <p:cNvPr id="1" name=""/>
-        <p:cNvGrpSpPr/>
-        <p:nvPr/>
-      </p:nvGrpSpPr>
-      <p:grpSpPr>
-        <a:xfrm>
-          <a:off x="0" y="0"/>
-          <a:ext cx="0" cy="0"/>
-          <a:chOff x="0" y="0"/>
-          <a:chExt cx="0" cy="0"/>
-        </a:xfrm>
-      </p:grpSpPr>
-      <p:sp>
-        <p:nvSpPr>
-          <p:cNvPr id="2" name="Title 1">
-            <a:extLst>
-              <a:ext uri="{FF2B5EF4-FFF2-40B4-BE49-F238E27FC236}">
-                <a16:creationId xmlns:a16="http://schemas.microsoft.com/office/drawing/2014/main" id="{60204AB8-B8C4-68E5-8618-190200BF1881}"/>
-              </a:ext>
-            </a:extLst>
-          </p:cNvPr>
-          <p:cNvSpPr>
-            <a:spLocks noGrp="1"/>
-          </p:cNvSpPr>
-          <p:nvPr>
-            <p:ph type="title"/>
-          </p:nvPr>
-        </p:nvSpPr>
-        <p:spPr>
-          <a:xfrm>
-            <a:off x="838199" y="73294"/>
-            <a:ext cx="10515600" cy="1325563"/>
-          </a:xfrm>
-        </p:spPr>
-        <p:txBody>
-          <a:bodyPr>
-            <a:normAutofit/>
-          </a:bodyPr>
-          <a:lstStyle/>
-          <a:p>
-            <a:pPr algn="ctr"/>
-            <a:r>
-              <a:rPr lang="sr-Latn-RS" sz="4000" dirty="0">
-                <a:latin typeface="Inter Medium" panose="02000503000000020004" pitchFamily="2" charset="0"/>
-                <a:ea typeface="Inter Medium" panose="02000503000000020004" pitchFamily="2" charset="0"/>
-              </a:rPr>
-              <a:t>Potpisi prstena</a:t>
-            </a:r>
-            <a:endParaRPr lang="en-US" sz="4000" dirty="0">
-              <a:latin typeface="Inter Medium" panose="02000503000000020004" pitchFamily="2" charset="0"/>
-              <a:ea typeface="Inter Medium" panose="02000503000000020004" pitchFamily="2" charset="0"/>
-            </a:endParaRPr>
-          </a:p>
-        </p:txBody>
-      </p:sp>
-      <p:pic>
-        <p:nvPicPr>
-          <p:cNvPr id="9" name="Content Placeholder 8">
-            <a:extLst>
-              <a:ext uri="{FF2B5EF4-FFF2-40B4-BE49-F238E27FC236}">
-                <a16:creationId xmlns:a16="http://schemas.microsoft.com/office/drawing/2014/main" id="{A7E69270-386F-4019-ACB5-0FFE243988B6}"/>
-              </a:ext>
-            </a:extLst>
-          </p:cNvPr>
-          <p:cNvPicPr>
-            <a:picLocks noGrp="1" noChangeAspect="1"/>
-          </p:cNvPicPr>
-          <p:nvPr>
-            <p:ph idx="1"/>
-          </p:nvPr>
-        </p:nvPicPr>
-        <p:blipFill>
-          <a:blip r:embed="rId2">
-            <a:extLst>
-              <a:ext uri="{28A0092B-C50C-407E-A947-70E740481C1C}">
-                <a14:useLocalDpi xmlns:a14="http://schemas.microsoft.com/office/drawing/2010/main" val="0"/>
-              </a:ext>
-            </a:extLst>
-          </a:blip>
-          <a:stretch>
-            <a:fillRect/>
-          </a:stretch>
-        </p:blipFill>
-        <p:spPr>
-          <a:xfrm>
-            <a:off x="1809346" y="1194577"/>
-            <a:ext cx="8384936" cy="5001942"/>
-          </a:xfrm>
-          <a:prstGeom prst="rect">
-            <a:avLst/>
-          </a:prstGeom>
-          <a:ln>
-            <a:noFill/>
-          </a:ln>
-          <a:effectLst>
-            <a:softEdge rad="112500"/>
-          </a:effectLst>
-        </p:spPr>
-      </p:pic>
-    </p:spTree>
-    <p:extLst>
-      <p:ext uri="{BB962C8B-B14F-4D97-AF65-F5344CB8AC3E}">
-        <p14:creationId xmlns:p14="http://schemas.microsoft.com/office/powerpoint/2010/main" val="4068785972"/>
       </p:ext>
     </p:extLst>
   </p:cSld>
